--- a/8주차/한국어/게임엔진기초_8주차_오프라인_강의슬라이드.pptx
+++ b/8주차/한국어/게임엔진기초_8주차_오프라인_강의슬라이드.pptx
@@ -127,7 +127,7 @@
   <p:extLst>
     <p:ext uri="{521415D9-36F7-43E2-AB2F-B90AF26B5E84}">
       <p14:sectionLst xmlns:p14="http://schemas.microsoft.com/office/powerpoint/2010/main">
-        <p14:section name="오리엔테이션" id="{297ebca0-bc98-4e26-fcef-37d478b9d613}">
+        <p14:section name="오리엔테이션" id="{6256d4bc-2449-8b20-dd65-1c3c04ed4bc6}">
           <p14:sldIdLst>
             <p14:sldId id="256"/>
             <p14:sldId id="257"/>
@@ -137,7 +137,7 @@
             <p14:sldId id="261"/>
           </p14:sldIdLst>
         </p14:section>
-        <p14:section name="AI를 쓰는 태도" id="{e9577e32-a547-ea73-380f-d8878316b2d6}">
+        <p14:section name="AI를 쓰는 태도" id="{89b573a4-416d-b92a-7e4b-0a71e606f913}">
           <p14:sldIdLst>
             <p14:sldId id="262"/>
             <p14:sldId id="263"/>
@@ -146,7 +146,7 @@
             <p14:sldId id="266"/>
           </p14:sldIdLst>
         </p14:section>
-        <p14:section name="예쁘게" id="{a23af789-9526-e3f9-14b1-227f837e53e5}">
+        <p14:section name="예쁘게" id="{2413f8db-e9eb-e67d-3940-c4e0068a3056}">
           <p14:sldIdLst>
             <p14:sldId id="267"/>
             <p14:sldId id="268"/>
@@ -155,7 +155,7 @@
             <p14:sldId id="271"/>
           </p14:sldIdLst>
         </p14:section>
-        <p14:section name="가져오기 · AI 코드" id="{32da3d19-2a8b-19e4-b9fd-e730054b5d47}">
+        <p14:section name="가져오기 · AI 코드" id="{3987215b-3755-b505-e74f-4ca8c30f2426}">
           <p14:sldIdLst>
             <p14:sldId id="272"/>
             <p14:sldId id="273"/>
@@ -163,7 +163,7 @@
             <p14:sldId id="275"/>
           </p14:sldIdLst>
         </p14:section>
-        <p14:section name="과제" id="{2a8cb512-cd10-ff6b-0282-ca80612cf8de}">
+        <p14:section name="과제" id="{212eb280-b207-d03e-9d68-ecb2a7f2d9ae}">
           <p14:sldIdLst>
             <p14:sldId id="276"/>
           </p14:sldIdLst>
@@ -3704,8 +3704,8 @@
         </p:nvSpPr>
         <p:spPr>
           <a:xfrm>
-            <a:off x="731520" y="1920240"/>
-            <a:ext cx="7498080" cy="822960"/>
+            <a:off x="731520" y="1783080"/>
+            <a:ext cx="7498080" cy="731520"/>
           </a:xfrm>
           <a:prstGeom prst="rect">
             <a:avLst/>
@@ -3724,7 +3724,7 @@
               <a:buNone/>
             </a:pPr>
             <a:r>
-              <a:rPr lang="en-US" sz="4000" b="1" dirty="0">
+              <a:rPr lang="en-US" sz="3600" b="1" dirty="0">
                 <a:solidFill>
                   <a:srgbClr val="FFFFFF"/>
                 </a:solidFill>
@@ -3732,9 +3732,9 @@
                 <a:ea typeface="Noto Sans KR" pitchFamily="34" charset="-122"/>
                 <a:cs typeface="Noto Sans KR" pitchFamily="34" charset="-120"/>
               </a:rPr>
-              <a:t>기말 프로젝트 시작</a:t>
-            </a:r>
-            <a:endParaRPr lang="en-US" sz="4000" dirty="0"/>
+              <a:t>오늘부터 시작.</a:t>
+            </a:r>
+            <a:endParaRPr lang="en-US" sz="3600" dirty="0"/>
           </a:p>
         </p:txBody>
       </p:sp>
@@ -3746,8 +3746,70 @@
         </p:nvSpPr>
         <p:spPr>
           <a:xfrm>
-            <a:off x="731520" y="2697480"/>
-            <a:ext cx="7498080" cy="822960"/>
+            <a:off x="731520" y="2514600"/>
+            <a:ext cx="7315200" cy="1188720"/>
+          </a:xfrm>
+          <a:prstGeom prst="rect">
+            <a:avLst/>
+          </a:prstGeom>
+          <a:noFill/>
+          <a:ln/>
+        </p:spPr>
+        <p:txBody>
+          <a:bodyPr wrap="square" lIns="0" tIns="0" rIns="0" bIns="0" rtlCol="0" anchor="t"/>
+          <a:lstStyle/>
+          <a:p>
+            <a:pPr algn="l" indent="0" marL="0">
+              <a:lnSpc>
+                <a:spcPct val="105000"/>
+              </a:lnSpc>
+              <a:buNone/>
+            </a:pPr>
+            <a:r>
+              <a:rPr lang="en-US" sz="3000" b="1" dirty="0">
+                <a:solidFill>
+                  <a:srgbClr val="E07A2E"/>
+                </a:solidFill>
+                <a:latin typeface="Noto Sans KR" pitchFamily="34" charset="0"/>
+                <a:ea typeface="Noto Sans KR" pitchFamily="34" charset="-122"/>
+                <a:cs typeface="Noto Sans KR" pitchFamily="34" charset="-120"/>
+              </a:rPr>
+              <a:t>AI와 에셋으로 한 달간</a:t>
+            </a:r>
+            <a:endParaRPr lang="en-US" sz="3000" dirty="0"/>
+          </a:p>
+          <a:p>
+            <a:pPr algn="l" indent="0" marL="0">
+              <a:lnSpc>
+                <a:spcPct val="105000"/>
+              </a:lnSpc>
+              <a:buNone/>
+            </a:pPr>
+            <a:r>
+              <a:rPr lang="en-US" sz="3000" b="1" dirty="0">
+                <a:solidFill>
+                  <a:srgbClr val="E07A2E"/>
+                </a:solidFill>
+                <a:latin typeface="Noto Sans KR" pitchFamily="34" charset="0"/>
+                <a:ea typeface="Noto Sans KR" pitchFamily="34" charset="-122"/>
+                <a:cs typeface="Noto Sans KR" pitchFamily="34" charset="-120"/>
+              </a:rPr>
+              <a:t>만들어 보는 게임 프로젝트</a:t>
+            </a:r>
+            <a:endParaRPr lang="en-US" sz="3000" dirty="0"/>
+          </a:p>
+        </p:txBody>
+      </p:sp>
+      <p:sp>
+        <p:nvSpPr>
+          <p:cNvPr id="26" name="Text 24"/>
+          <p:cNvSpPr txBox="1"/>
+          <p:nvPr/>
+        </p:nvSpPr>
+        <p:spPr>
+          <a:xfrm>
+            <a:off x="731520" y="3931920"/>
+            <a:ext cx="7132320" cy="731520"/>
           </a:xfrm>
           <a:prstGeom prst="rect">
             <a:avLst/>
@@ -3766,59 +3828,17 @@
               <a:buNone/>
             </a:pPr>
             <a:r>
-              <a:rPr lang="en-US" sz="4000" b="1" dirty="0">
-                <a:solidFill>
-                  <a:srgbClr val="E07A2E"/>
+              <a:rPr lang="en-US" sz="1600" dirty="0">
+                <a:solidFill>
+                  <a:srgbClr val="D5DBE2"/>
                 </a:solidFill>
                 <a:latin typeface="Noto Sans KR" pitchFamily="34" charset="0"/>
                 <a:ea typeface="Noto Sans KR" pitchFamily="34" charset="-122"/>
                 <a:cs typeface="Noto Sans KR" pitchFamily="34" charset="-120"/>
               </a:rPr>
-              <a:t>AI와 에셋으로, 혼자서도 멋지게</a:t>
-            </a:r>
-            <a:endParaRPr lang="en-US" sz="4000" dirty="0"/>
-          </a:p>
-        </p:txBody>
-      </p:sp>
-      <p:sp>
-        <p:nvSpPr>
-          <p:cNvPr id="26" name="Text 24"/>
-          <p:cNvSpPr txBox="1"/>
-          <p:nvPr/>
-        </p:nvSpPr>
-        <p:spPr>
-          <a:xfrm>
-            <a:off x="731520" y="3657600"/>
-            <a:ext cx="7132320" cy="731520"/>
-          </a:xfrm>
-          <a:prstGeom prst="rect">
-            <a:avLst/>
-          </a:prstGeom>
-          <a:noFill/>
-          <a:ln/>
-        </p:spPr>
-        <p:txBody>
-          <a:bodyPr wrap="square" lIns="0" tIns="0" rIns="0" bIns="0" rtlCol="0" anchor="t"/>
-          <a:lstStyle/>
-          <a:p>
-            <a:pPr algn="l" indent="0" marL="0">
-              <a:lnSpc>
-                <a:spcPct val="115000"/>
-              </a:lnSpc>
-              <a:buNone/>
-            </a:pPr>
-            <a:r>
-              <a:rPr lang="en-US" sz="1700" dirty="0">
-                <a:solidFill>
-                  <a:srgbClr val="D5DBE2"/>
-                </a:solidFill>
-                <a:latin typeface="Noto Sans KR" pitchFamily="34" charset="0"/>
-                <a:ea typeface="Noto Sans KR" pitchFamily="34" charset="-122"/>
-                <a:cs typeface="Noto Sans KR" pitchFamily="34" charset="-120"/>
-              </a:rPr>
               <a:t>모두 새 프로젝트로 두 번째 게임을 만듭니다. 기획부터 그래픽까지 AI와 에셋을 도구로 쓰는 법을 함께 익힙니다</a:t>
             </a:r>
-            <a:endParaRPr lang="en-US" sz="1700" dirty="0"/>
+            <a:endParaRPr lang="en-US" sz="1600" dirty="0"/>
           </a:p>
         </p:txBody>
       </p:sp>

--- a/8주차/한국어/게임엔진기초_8주차_오프라인_강의슬라이드.pptx
+++ b/8주차/한국어/게임엔진기초_8주차_오프라인_강의슬라이드.pptx
@@ -133,7 +133,7 @@
   <p:extLst>
     <p:ext uri="{521415D9-36F7-43E2-AB2F-B90AF26B5E84}">
       <p14:sectionLst xmlns:p14="http://schemas.microsoft.com/office/powerpoint/2010/main">
-        <p14:section name="오리엔테이션" id="{ea4265cc-8a2d-b841-7dba-9d3cc11e130f}">
+        <p14:section name="오리엔테이션" id="{d33ede2b-b6fa-a7dc-74de-dd0276d91470}">
           <p14:sldIdLst>
             <p14:sldId id="256"/>
             <p14:sldId id="257"/>
@@ -148,7 +148,7 @@
             <p14:sldId id="266"/>
           </p14:sldIdLst>
         </p14:section>
-        <p14:section name="AI를 쓰는 태도" id="{ba172625-d822-258d-045b-1efb0db86813}">
+        <p14:section name="AI를 쓰는 태도" id="{a962f2ce-00ae-84ee-dc7b-f3280503e042}">
           <p14:sldIdLst>
             <p14:sldId id="267"/>
             <p14:sldId id="268"/>
@@ -157,7 +157,7 @@
             <p14:sldId id="271"/>
           </p14:sldIdLst>
         </p14:section>
-        <p14:section name="예쁘게" id="{3236bc1a-39a7-6a5c-01af-ecd8b9203c26}">
+        <p14:section name="예쁘게" id="{4cb99a0c-3d0f-33b4-a9ad-cff4f8154a5f}">
           <p14:sldIdLst>
             <p14:sldId id="272"/>
             <p14:sldId id="273"/>
@@ -167,7 +167,7 @@
             <p14:sldId id="277"/>
           </p14:sldIdLst>
         </p14:section>
-        <p14:section name="가져오기 · AI 코드" id="{3d219a36-8faf-eff9-9ae6-65a8e0d2b8ad}">
+        <p14:section name="가져오기 · AI 코드" id="{e826665a-d3d5-8c16-104f-610d5ff3c6fe}">
           <p14:sldIdLst>
             <p14:sldId id="278"/>
             <p14:sldId id="279"/>
@@ -175,7 +175,7 @@
             <p14:sldId id="281"/>
           </p14:sldIdLst>
         </p14:section>
-        <p14:section name="과제" id="{4a40ad19-03fb-2fa6-a301-6f484b938158}">
+        <p14:section name="과제" id="{def8f356-3ff6-44b1-a181-2d2ab9d2ef79}">
           <p14:sldIdLst>
             <p14:sldId id="282"/>
           </p14:sldIdLst>
@@ -31979,7 +31979,7 @@
                 <a:ea typeface="Noto Sans KR" pitchFamily="34" charset="-122"/>
                 <a:cs typeface="Noto Sans KR" pitchFamily="34" charset="-120"/>
               </a:rPr>
-              <a:t> (2015) — 탭하면 점프, 누르고 있으면 묘기. 조작은 사실상 하나. 리뷰에서 가장 많이 칭찬받은 것은 </a:t>
+              <a:t> (2015) — 탭하면 점프, 공중에서 누르고 있으면 묘기. 조작은 사실상 하나. 리뷰에서 가장 많이 칭찬받은 것은 </a:t>
             </a:r>
             <a:pPr algn="l" indent="0" marL="0">
               <a:lnSpc>
